--- a/documentaions/Presentation.pptx
+++ b/documentaions/Presentation.pptx
@@ -3221,7 +3221,7 @@
         </p:nvSpPr>
         <p:spPr>
           <a:xfrm>
-            <a:off x="6080760" y="621792"/>
+            <a:off x="6080760" y="1193945"/>
             <a:ext cx="2743200" cy="914400"/>
           </a:xfrm>
           <a:prstGeom prst="rect">
@@ -3260,7 +3260,7 @@
         </p:nvSpPr>
         <p:spPr>
           <a:xfrm>
-            <a:off x="6080760" y="621792"/>
+            <a:off x="6080760" y="1193945"/>
             <a:ext cx="45720" cy="914400"/>
           </a:xfrm>
           <a:prstGeom prst="rect">
@@ -3292,7 +3292,7 @@
         </p:nvSpPr>
         <p:spPr>
           <a:xfrm>
-            <a:off x="6236208" y="676656"/>
+            <a:off x="6236208" y="1248809"/>
             <a:ext cx="2514600" cy="292608"/>
           </a:xfrm>
           <a:prstGeom prst="rect">
@@ -3328,7 +3328,7 @@
         </p:nvSpPr>
         <p:spPr>
           <a:xfrm>
-            <a:off x="6236208" y="960120"/>
+            <a:off x="6236208" y="1532273"/>
             <a:ext cx="2514600" cy="502920"/>
           </a:xfrm>
           <a:prstGeom prst="rect">
@@ -3364,7 +3364,7 @@
         </p:nvSpPr>
         <p:spPr>
           <a:xfrm>
-            <a:off x="6080760" y="1664208"/>
+            <a:off x="6080760" y="2236361"/>
             <a:ext cx="2743200" cy="914400"/>
           </a:xfrm>
           <a:prstGeom prst="rect">
@@ -3403,7 +3403,7 @@
         </p:nvSpPr>
         <p:spPr>
           <a:xfrm>
-            <a:off x="6080760" y="1664208"/>
+            <a:off x="6080760" y="2236361"/>
             <a:ext cx="45720" cy="914400"/>
           </a:xfrm>
           <a:prstGeom prst="rect">
@@ -3435,7 +3435,7 @@
         </p:nvSpPr>
         <p:spPr>
           <a:xfrm>
-            <a:off x="6236208" y="1719072"/>
+            <a:off x="6236208" y="2291225"/>
             <a:ext cx="2514600" cy="292608"/>
           </a:xfrm>
           <a:prstGeom prst="rect">
@@ -3471,7 +3471,7 @@
         </p:nvSpPr>
         <p:spPr>
           <a:xfrm>
-            <a:off x="6236208" y="2002536"/>
+            <a:off x="6236208" y="2574689"/>
             <a:ext cx="2514600" cy="502920"/>
           </a:xfrm>
           <a:prstGeom prst="rect">
@@ -3501,13 +3501,13 @@
       </p:sp>
       <p:sp>
         <p:nvSpPr>
-          <p:cNvPr id="14" name="Shape 11"/>
-          <p:cNvSpPr/>
-          <p:nvPr/>
-        </p:nvSpPr>
-        <p:spPr>
-          <a:xfrm>
-            <a:off x="6080760" y="2706624"/>
+          <p:cNvPr id="18" name="Shape 15"/>
+          <p:cNvSpPr/>
+          <p:nvPr/>
+        </p:nvSpPr>
+        <p:spPr>
+          <a:xfrm>
+            <a:off x="6080760" y="3273552"/>
             <a:ext cx="2743200" cy="914400"/>
           </a:xfrm>
           <a:prstGeom prst="rect">
@@ -3540,13 +3540,13 @@
       </p:sp>
       <p:sp>
         <p:nvSpPr>
-          <p:cNvPr id="15" name="Shape 12"/>
-          <p:cNvSpPr/>
-          <p:nvPr/>
-        </p:nvSpPr>
-        <p:spPr>
-          <a:xfrm>
-            <a:off x="6080760" y="2706624"/>
+          <p:cNvPr id="19" name="Shape 16"/>
+          <p:cNvSpPr/>
+          <p:nvPr/>
+        </p:nvSpPr>
+        <p:spPr>
+          <a:xfrm>
+            <a:off x="6080760" y="3273552"/>
             <a:ext cx="45720" cy="914400"/>
           </a:xfrm>
           <a:prstGeom prst="rect">
@@ -3572,13 +3572,13 @@
       </p:sp>
       <p:sp>
         <p:nvSpPr>
-          <p:cNvPr id="16" name="Text 13"/>
-          <p:cNvSpPr/>
-          <p:nvPr/>
-        </p:nvSpPr>
-        <p:spPr>
-          <a:xfrm>
-            <a:off x="6236208" y="2761488"/>
+          <p:cNvPr id="20" name="Text 17"/>
+          <p:cNvSpPr/>
+          <p:nvPr/>
+        </p:nvSpPr>
+        <p:spPr>
+          <a:xfrm>
+            <a:off x="6236208" y="3328416"/>
             <a:ext cx="2514600" cy="292608"/>
           </a:xfrm>
           <a:prstGeom prst="rect">
@@ -3600,7 +3600,7 @@
                   <a:srgbClr val="005A8F"/>
                 </a:solidFill>
               </a:rPr>
-              <a:t>Fly-to Animation</a:t>
+              <a:t>Department Level</a:t>
             </a:r>
             <a:endParaRPr lang="en-US" sz="1200" dirty="0"/>
           </a:p>
@@ -3608,156 +3608,13 @@
       </p:sp>
       <p:sp>
         <p:nvSpPr>
-          <p:cNvPr id="17" name="Text 14"/>
-          <p:cNvSpPr/>
-          <p:nvPr/>
-        </p:nvSpPr>
-        <p:spPr>
-          <a:xfrm>
-            <a:off x="6236208" y="3044952"/>
-            <a:ext cx="2514600" cy="502920"/>
-          </a:xfrm>
-          <a:prstGeom prst="rect">
-            <a:avLst/>
-          </a:prstGeom>
-          <a:noFill/>
-          <a:ln/>
-        </p:spPr>
-        <p:txBody>
-          <a:bodyPr wrap="square" lIns="0" tIns="0" rIns="0" bIns="0" rtlCol="0" anchor="ctr"/>
-          <a:lstStyle/>
-          <a:p>
-            <a:pPr marL="0" indent="0">
-              <a:buNone/>
-            </a:pPr>
-            <a:r>
-              <a:rPr lang="en-US" sz="1050" dirty="0">
-                <a:solidFill>
-                  <a:srgbClr val="1E3040"/>
-                </a:solidFill>
-              </a:rPr>
-              <a:t>Selecting an institution from search triggers a smooth map fly-to.</a:t>
-            </a:r>
-            <a:endParaRPr lang="en-US" sz="1050" dirty="0"/>
-          </a:p>
-        </p:txBody>
-      </p:sp>
-      <p:sp>
-        <p:nvSpPr>
-          <p:cNvPr id="18" name="Shape 15"/>
-          <p:cNvSpPr/>
-          <p:nvPr/>
-        </p:nvSpPr>
-        <p:spPr>
-          <a:xfrm>
-            <a:off x="6080760" y="3749040"/>
-            <a:ext cx="2743200" cy="914400"/>
-          </a:xfrm>
-          <a:prstGeom prst="rect">
-            <a:avLst/>
-          </a:prstGeom>
-          <a:solidFill>
-            <a:srgbClr val="EBF4FA"/>
-          </a:solidFill>
-          <a:ln w="6350">
-            <a:solidFill>
-              <a:srgbClr val="C0D8E8"/>
-            </a:solidFill>
-            <a:prstDash val="solid"/>
-          </a:ln>
-          <a:effectLst>
-            <a:outerShdw blurRad="50800" dist="25400" dir="8100000" algn="bl" rotWithShape="0">
-              <a:srgbClr val="000000">
-                <a:alpha val="7000"/>
-              </a:srgbClr>
-            </a:outerShdw>
-          </a:effectLst>
-        </p:spPr>
-        <p:txBody>
-          <a:bodyPr/>
-          <a:lstStyle/>
-          <a:p>
-            <a:endParaRPr lang="cs-CZ"/>
-          </a:p>
-        </p:txBody>
-      </p:sp>
-      <p:sp>
-        <p:nvSpPr>
-          <p:cNvPr id="19" name="Shape 16"/>
-          <p:cNvSpPr/>
-          <p:nvPr/>
-        </p:nvSpPr>
-        <p:spPr>
-          <a:xfrm>
-            <a:off x="6080760" y="3749040"/>
-            <a:ext cx="45720" cy="914400"/>
-          </a:xfrm>
-          <a:prstGeom prst="rect">
-            <a:avLst/>
-          </a:prstGeom>
-          <a:solidFill>
-            <a:srgbClr val="005A8F"/>
-          </a:solidFill>
-          <a:ln w="12700">
-            <a:solidFill>
-              <a:srgbClr val="005A8F"/>
-            </a:solidFill>
-            <a:prstDash val="solid"/>
-          </a:ln>
-        </p:spPr>
-        <p:txBody>
-          <a:bodyPr/>
-          <a:lstStyle/>
-          <a:p>
-            <a:endParaRPr lang="cs-CZ"/>
-          </a:p>
-        </p:txBody>
-      </p:sp>
-      <p:sp>
-        <p:nvSpPr>
-          <p:cNvPr id="20" name="Text 17"/>
-          <p:cNvSpPr/>
-          <p:nvPr/>
-        </p:nvSpPr>
-        <p:spPr>
-          <a:xfrm>
-            <a:off x="6236208" y="3803904"/>
-            <a:ext cx="2514600" cy="292608"/>
-          </a:xfrm>
-          <a:prstGeom prst="rect">
-            <a:avLst/>
-          </a:prstGeom>
-          <a:noFill/>
-          <a:ln/>
-        </p:spPr>
-        <p:txBody>
-          <a:bodyPr wrap="square" lIns="0" tIns="0" rIns="0" bIns="0" rtlCol="0" anchor="ctr"/>
-          <a:lstStyle/>
-          <a:p>
-            <a:pPr marL="0" indent="0">
-              <a:buNone/>
-            </a:pPr>
-            <a:r>
-              <a:rPr lang="en-US" sz="1200" b="1" dirty="0">
-                <a:solidFill>
-                  <a:srgbClr val="005A8F"/>
-                </a:solidFill>
-              </a:rPr>
-              <a:t>Department Level</a:t>
-            </a:r>
-            <a:endParaRPr lang="en-US" sz="1200" dirty="0"/>
-          </a:p>
-        </p:txBody>
-      </p:sp>
-      <p:sp>
-        <p:nvSpPr>
           <p:cNvPr id="21" name="Text 18"/>
           <p:cNvSpPr/>
           <p:nvPr/>
         </p:nvSpPr>
         <p:spPr>
           <a:xfrm>
-            <a:off x="6236208" y="4087368"/>
+            <a:off x="6236208" y="3611880"/>
             <a:ext cx="2514600" cy="502920"/>
           </a:xfrm>
           <a:prstGeom prst="rect">
